--- a/notes/Python  Tut-01.pptx
+++ b/notes/Python  Tut-01.pptx
@@ -251,7 +251,7 @@
           <a:p>
             <a:fld id="{6B204C76-62AF-4A47-BD74-85C08E4F921E}" type="datetimeFigureOut">
               <a:rPr lang="en-IN" smtClean="0"/>
-              <a:t>14-08-2025</a:t>
+              <a:t>28-07-2026</a:t>
             </a:fld>
             <a:endParaRPr lang="en-IN"/>
           </a:p>
@@ -421,7 +421,7 @@
           <a:p>
             <a:fld id="{6B204C76-62AF-4A47-BD74-85C08E4F921E}" type="datetimeFigureOut">
               <a:rPr lang="en-IN" smtClean="0"/>
-              <a:t>14-08-2025</a:t>
+              <a:t>28-07-2026</a:t>
             </a:fld>
             <a:endParaRPr lang="en-IN"/>
           </a:p>
@@ -601,7 +601,7 @@
           <a:p>
             <a:fld id="{6B204C76-62AF-4A47-BD74-85C08E4F921E}" type="datetimeFigureOut">
               <a:rPr lang="en-IN" smtClean="0"/>
-              <a:t>14-08-2025</a:t>
+              <a:t>28-07-2026</a:t>
             </a:fld>
             <a:endParaRPr lang="en-IN"/>
           </a:p>
@@ -771,7 +771,7 @@
           <a:p>
             <a:fld id="{6B204C76-62AF-4A47-BD74-85C08E4F921E}" type="datetimeFigureOut">
               <a:rPr lang="en-IN" smtClean="0"/>
-              <a:t>14-08-2025</a:t>
+              <a:t>28-07-2026</a:t>
             </a:fld>
             <a:endParaRPr lang="en-IN"/>
           </a:p>
@@ -1017,7 +1017,7 @@
           <a:p>
             <a:fld id="{6B204C76-62AF-4A47-BD74-85C08E4F921E}" type="datetimeFigureOut">
               <a:rPr lang="en-IN" smtClean="0"/>
-              <a:t>14-08-2025</a:t>
+              <a:t>28-07-2026</a:t>
             </a:fld>
             <a:endParaRPr lang="en-IN"/>
           </a:p>
@@ -1249,7 +1249,7 @@
           <a:p>
             <a:fld id="{6B204C76-62AF-4A47-BD74-85C08E4F921E}" type="datetimeFigureOut">
               <a:rPr lang="en-IN" smtClean="0"/>
-              <a:t>14-08-2025</a:t>
+              <a:t>28-07-2026</a:t>
             </a:fld>
             <a:endParaRPr lang="en-IN"/>
           </a:p>
@@ -1616,7 +1616,7 @@
           <a:p>
             <a:fld id="{6B204C76-62AF-4A47-BD74-85C08E4F921E}" type="datetimeFigureOut">
               <a:rPr lang="en-IN" smtClean="0"/>
-              <a:t>14-08-2025</a:t>
+              <a:t>28-07-2026</a:t>
             </a:fld>
             <a:endParaRPr lang="en-IN"/>
           </a:p>
@@ -1734,7 +1734,7 @@
           <a:p>
             <a:fld id="{6B204C76-62AF-4A47-BD74-85C08E4F921E}" type="datetimeFigureOut">
               <a:rPr lang="en-IN" smtClean="0"/>
-              <a:t>14-08-2025</a:t>
+              <a:t>28-07-2026</a:t>
             </a:fld>
             <a:endParaRPr lang="en-IN"/>
           </a:p>
@@ -1829,7 +1829,7 @@
           <a:p>
             <a:fld id="{6B204C76-62AF-4A47-BD74-85C08E4F921E}" type="datetimeFigureOut">
               <a:rPr lang="en-IN" smtClean="0"/>
-              <a:t>14-08-2025</a:t>
+              <a:t>28-07-2026</a:t>
             </a:fld>
             <a:endParaRPr lang="en-IN"/>
           </a:p>
@@ -2106,7 +2106,7 @@
           <a:p>
             <a:fld id="{6B204C76-62AF-4A47-BD74-85C08E4F921E}" type="datetimeFigureOut">
               <a:rPr lang="en-IN" smtClean="0"/>
-              <a:t>14-08-2025</a:t>
+              <a:t>28-07-2026</a:t>
             </a:fld>
             <a:endParaRPr lang="en-IN"/>
           </a:p>
@@ -2359,7 +2359,7 @@
           <a:p>
             <a:fld id="{6B204C76-62AF-4A47-BD74-85C08E4F921E}" type="datetimeFigureOut">
               <a:rPr lang="en-IN" smtClean="0"/>
-              <a:t>14-08-2025</a:t>
+              <a:t>28-07-2026</a:t>
             </a:fld>
             <a:endParaRPr lang="en-IN"/>
           </a:p>
@@ -2572,7 +2572,7 @@
           <a:p>
             <a:fld id="{6B204C76-62AF-4A47-BD74-85C08E4F921E}" type="datetimeFigureOut">
               <a:rPr lang="en-IN" smtClean="0"/>
-              <a:t>14-08-2025</a:t>
+              <a:t>28-07-2026</a:t>
             </a:fld>
             <a:endParaRPr lang="en-IN"/>
           </a:p>
@@ -3025,11 +3025,7 @@
             </a:r>
             <a:r>
               <a:rPr lang="en-IN" dirty="0" smtClean="0"/>
-              <a:t>umar </a:t>
-            </a:r>
-            <a:r>
-              <a:rPr lang="en-IN" dirty="0" smtClean="0"/>
-              <a:t>Nayak</a:t>
+              <a:t>umar Nayak</a:t>
             </a:r>
             <a:endParaRPr lang="en-IN" dirty="0"/>
           </a:p>
@@ -3376,11 +3372,7 @@
             </a:r>
             <a:r>
               <a:rPr lang="en-GB" dirty="0" smtClean="0"/>
-              <a:t>Applications (Django), </a:t>
-            </a:r>
-            <a:r>
-              <a:rPr lang="en-GB" dirty="0" smtClean="0"/>
-              <a:t>Data </a:t>
+              <a:t>Applications (Django), Data </a:t>
             </a:r>
             <a:r>
               <a:rPr lang="en-GB" dirty="0"/>
@@ -3487,8 +3479,12 @@
           <a:p>
             <a:pPr algn="just"/>
             <a:r>
+              <a:rPr lang="en-GB" b="1" dirty="0"/>
+              <a:t>Guido Van Rossum</a:t>
+            </a:r>
+            <a:r>
               <a:rPr lang="en-GB" dirty="0"/>
-              <a:t>Guido Van Rossum developed Python language while working in National Research Institute (NRI) in </a:t>
+              <a:t> developed Python language while working in National Research Institute (NRI) in </a:t>
             </a:r>
             <a:r>
               <a:rPr lang="en-GB" dirty="0" smtClean="0"/>
